--- a/CRA_Interpreter_발표.pptx
+++ b/CRA_Interpreter_발표.pptx
@@ -1855,12 +1855,9 @@
             </a:r>
             <a:r>
               <a:rPr lang="ko-KR" altLang="en-US" dirty="0"/>
-              <a:t> 구현해서 테스트를 통과시켰습니다</a:t>
-            </a:r>
-            <a:r>
-              <a:rPr lang="en-US" altLang="ko-KR" dirty="0"/>
-              <a:t>.</a:t>
-            </a:r>
+              <a:t> 구현해서 테스트를 통과시키는 수준의 코드를 만든 뒤</a:t>
+            </a:r>
+            <a:endParaRPr lang="en-US" altLang="ko-KR" dirty="0"/>
           </a:p>
           <a:p>
             <a:r>
@@ -2747,7 +2744,7 @@
           <a:p>
             <a:r>
               <a:rPr lang="ko-KR" altLang="en-US" dirty="0"/>
-              <a:t>수정은 </a:t>
+              <a:t>그래서 </a:t>
             </a:r>
             <a:r>
               <a:rPr lang="ko-KR" altLang="en-US" dirty="0" err="1"/>
@@ -2889,32 +2886,6 @@
             </a:r>
           </a:p>
           <a:p>
-            <a:pPr rtl="0"/>
-            <a:r>
-              <a:rPr lang="en-US" altLang="ko-KR" dirty="0" err="1"/>
-              <a:t>optimizer_.optimize</a:t>
-            </a:r>
-            <a:r>
-              <a:rPr lang="en-US" altLang="ko-KR" dirty="0"/>
-              <a:t>(std::move(</a:t>
-            </a:r>
-            <a:r>
-              <a:rPr lang="en-US" altLang="ko-KR" dirty="0" err="1"/>
-              <a:t>stmts</a:t>
-            </a:r>
-            <a:r>
-              <a:rPr lang="en-US" altLang="ko-KR" dirty="0"/>
-              <a:t>));</a:t>
-            </a:r>
-            <a:br>
-              <a:rPr lang="en-US" altLang="ko-KR" dirty="0"/>
-            </a:br>
-            <a:r>
-              <a:rPr lang="en-US" altLang="ko-KR" dirty="0"/>
-              <a:t>EXPECT_EQ(raw-&gt;distance, 0);</a:t>
-            </a:r>
-          </a:p>
-          <a:p>
             <a:r>
               <a:rPr lang="en-US" altLang="ko-KR" dirty="0"/>
               <a:t>optimize()</a:t>
@@ -2976,31 +2947,6 @@
           <a:p>
             <a:r>
               <a:rPr lang="ko-KR" altLang="en-US" dirty="0"/>
-              <a:t>그런데 아래에서 </a:t>
-            </a:r>
-            <a:r>
-              <a:rPr lang="en-US" altLang="ko-KR" dirty="0"/>
-              <a:t>raw-&gt;distance</a:t>
-            </a:r>
-            <a:r>
-              <a:rPr lang="ko-KR" altLang="en-US" dirty="0"/>
-              <a:t>를 확인하고 있기 때문에</a:t>
-            </a:r>
-            <a:br>
-              <a:rPr lang="ko-KR" altLang="en-US" dirty="0"/>
-            </a:br>
-            <a:r>
-              <a:rPr lang="ko-KR" altLang="en-US" dirty="0"/>
-              <a:t>이미 해제된 메모리에 접근할 수 있습니다</a:t>
-            </a:r>
-            <a:r>
-              <a:rPr lang="en-US" altLang="ko-KR" dirty="0"/>
-              <a:t>.</a:t>
-            </a:r>
-          </a:p>
-          <a:p>
-            <a:r>
-              <a:rPr lang="ko-KR" altLang="en-US" dirty="0"/>
               <a:t>수정 후에는 </a:t>
             </a:r>
             <a:r>
@@ -3025,53 +2971,23 @@
             </a:r>
           </a:p>
           <a:p>
-            <a:pPr rtl="0"/>
-            <a:r>
-              <a:rPr lang="en-US" altLang="ko-KR" dirty="0"/>
-              <a:t>auto kept = </a:t>
-            </a:r>
-            <a:r>
-              <a:rPr lang="en-US" altLang="ko-KR" dirty="0" err="1"/>
-              <a:t>optimizer_.optimize</a:t>
-            </a:r>
-            <a:r>
-              <a:rPr lang="en-US" altLang="ko-KR" dirty="0"/>
-              <a:t>(std::move(</a:t>
-            </a:r>
-            <a:r>
-              <a:rPr lang="en-US" altLang="ko-KR" dirty="0" err="1"/>
-              <a:t>stmts</a:t>
-            </a:r>
-            <a:r>
-              <a:rPr lang="en-US" altLang="ko-KR" dirty="0"/>
-              <a:t>));</a:t>
+            <a:r>
+              <a:rPr lang="ko-KR" altLang="en-US" dirty="0"/>
+              <a:t>이렇게 하면 </a:t>
+            </a:r>
+            <a:r>
+              <a:rPr lang="en-US" altLang="ko-KR" dirty="0"/>
+              <a:t>kept</a:t>
+            </a:r>
+            <a:r>
+              <a:rPr lang="ko-KR" altLang="en-US" dirty="0"/>
+              <a:t>가 살아있는 동안</a:t>
             </a:r>
             <a:br>
-              <a:rPr lang="en-US" altLang="ko-KR" dirty="0"/>
+              <a:rPr lang="ko-KR" altLang="en-US" dirty="0"/>
             </a:br>
             <a:r>
               <a:rPr lang="en-US" altLang="ko-KR" dirty="0"/>
-              <a:t>EXPECT_EQ(raw-&gt;distance, 0);</a:t>
-            </a:r>
-          </a:p>
-          <a:p>
-            <a:r>
-              <a:rPr lang="ko-KR" altLang="en-US" dirty="0"/>
-              <a:t>이렇게 하면 </a:t>
-            </a:r>
-            <a:r>
-              <a:rPr lang="en-US" altLang="ko-KR" dirty="0"/>
-              <a:t>kept</a:t>
-            </a:r>
-            <a:r>
-              <a:rPr lang="ko-KR" altLang="en-US" dirty="0"/>
-              <a:t>가 살아있는 동안</a:t>
-            </a:r>
-            <a:br>
-              <a:rPr lang="ko-KR" altLang="en-US" dirty="0"/>
-            </a:br>
-            <a:r>
-              <a:rPr lang="en-US" altLang="ko-KR" dirty="0"/>
               <a:t>AST</a:t>
             </a:r>
             <a:r>
@@ -3100,57 +3016,6 @@
               <a:rPr lang="en-US" altLang="ko-KR" dirty="0"/>
               <a:t>.</a:t>
             </a:r>
-          </a:p>
-          <a:p>
-            <a:r>
-              <a:rPr lang="ko-KR" altLang="en-US" dirty="0"/>
-              <a:t>결과적으로 동일한 패턴 </a:t>
-            </a:r>
-            <a:r>
-              <a:rPr lang="en-US" altLang="ko-KR" dirty="0"/>
-              <a:t>4</a:t>
-            </a:r>
-            <a:r>
-              <a:rPr lang="ko-KR" altLang="en-US" dirty="0"/>
-              <a:t>곳을 수정했고</a:t>
-            </a:r>
-            <a:r>
-              <a:rPr lang="en-US" altLang="ko-KR" dirty="0"/>
-              <a:t>,</a:t>
-            </a:r>
-            <a:br>
-              <a:rPr lang="en-US" altLang="ko-KR" dirty="0"/>
-            </a:br>
-            <a:r>
-              <a:rPr lang="en-US" altLang="ko-KR" dirty="0"/>
-              <a:t>Debug </a:t>
-            </a:r>
-            <a:r>
-              <a:rPr lang="ko-KR" altLang="en-US" dirty="0"/>
-              <a:t>빌드에서 발생하던 </a:t>
-            </a:r>
-            <a:r>
-              <a:rPr lang="en-US" altLang="ko-KR" dirty="0"/>
-              <a:t>4</a:t>
-            </a:r>
-            <a:r>
-              <a:rPr lang="ko-KR" altLang="en-US" dirty="0"/>
-              <a:t>개 테스트 </a:t>
-            </a:r>
-            <a:r>
-              <a:rPr lang="ko-KR" altLang="en-US" dirty="0" err="1"/>
-              <a:t>크래시를</a:t>
-            </a:r>
-            <a:r>
-              <a:rPr lang="ko-KR" altLang="en-US" dirty="0"/>
-              <a:t> 해결했습니다</a:t>
-            </a:r>
-            <a:r>
-              <a:rPr lang="en-US" altLang="ko-KR" dirty="0"/>
-              <a:t>.</a:t>
-            </a:r>
-          </a:p>
-          <a:p>
             <a:endParaRPr lang="ko-KR" altLang="en-US" dirty="0"/>
           </a:p>
         </p:txBody>
@@ -3299,18 +3164,7 @@
             </a:r>
             <a:r>
               <a:rPr lang="ko-KR" altLang="en-US" dirty="0"/>
-              <a:t>의 여러 메서드에서</a:t>
-            </a:r>
-            <a:br>
-              <a:rPr lang="ko-KR" altLang="en-US" dirty="0"/>
-            </a:br>
-            <a:r>
-              <a:rPr lang="en-US" altLang="ko-KR" dirty="0"/>
-              <a:t>while(match)</a:t>
-            </a:r>
-            <a:r>
-              <a:rPr lang="ko-KR" altLang="en-US" dirty="0"/>
-              <a:t>로 연산자를 처리하고 </a:t>
+              <a:t>의 여러 메서드에서 연산자를 처리하고 </a:t>
             </a:r>
             <a:r>
               <a:rPr lang="en-US" altLang="ko-KR" dirty="0"/>
@@ -3563,30 +3417,7 @@
           <a:p>
             <a:r>
               <a:rPr lang="ko-KR" altLang="en-US" dirty="0"/>
-              <a:t>수정 전에는 </a:t>
-            </a:r>
-            <a:r>
-              <a:rPr lang="en-US" altLang="ko-KR" dirty="0" err="1"/>
-              <a:t>logicalOr</a:t>
-            </a:r>
-            <a:r>
-              <a:rPr lang="en-US" altLang="ko-KR" dirty="0"/>
-              <a:t>, </a:t>
-            </a:r>
-            <a:r>
-              <a:rPr lang="en-US" altLang="ko-KR" dirty="0" err="1"/>
-              <a:t>logicalAnd</a:t>
-            </a:r>
-            <a:r>
-              <a:rPr lang="en-US" altLang="ko-KR" dirty="0"/>
-              <a:t>, equality, comparison, term, factor</a:t>
-            </a:r>
-            <a:br>
-              <a:rPr lang="en-US" altLang="ko-KR" dirty="0"/>
-            </a:br>
-            <a:r>
-              <a:rPr lang="ko-KR" altLang="en-US" dirty="0"/>
-              <a:t>총 </a:t>
+              <a:t>수정 전에는 총 </a:t>
             </a:r>
             <a:r>
               <a:rPr lang="en-US" altLang="ko-KR" dirty="0"/>
@@ -3604,62 +3435,7 @@
           <a:p>
             <a:r>
               <a:rPr lang="ko-KR" altLang="en-US" dirty="0"/>
-              <a:t>공통 패턴은</a:t>
-            </a:r>
-            <a:br>
-              <a:rPr lang="ko-KR" altLang="en-US" dirty="0"/>
-            </a:br>
-            <a:r>
-              <a:rPr lang="ko-KR" altLang="en-US" dirty="0"/>
-              <a:t>왼쪽 표현식을 파싱하고</a:t>
-            </a:r>
-            <a:r>
-              <a:rPr lang="en-US" altLang="ko-KR" dirty="0"/>
-              <a:t>,</a:t>
-            </a:r>
-            <a:br>
-              <a:rPr lang="en-US" altLang="ko-KR" dirty="0"/>
-            </a:br>
-            <a:r>
-              <a:rPr lang="ko-KR" altLang="en-US" dirty="0"/>
-              <a:t>특정 연산자를 만나면 오른쪽 표현식을 </a:t>
-            </a:r>
-            <a:r>
-              <a:rPr lang="ko-KR" altLang="en-US" dirty="0" err="1"/>
-              <a:t>파싱한</a:t>
-            </a:r>
-            <a:r>
-              <a:rPr lang="ko-KR" altLang="en-US" dirty="0"/>
-              <a:t> 뒤</a:t>
-            </a:r>
-            <a:r>
-              <a:rPr lang="en-US" altLang="ko-KR" dirty="0"/>
-              <a:t>,</a:t>
-            </a:r>
-            <a:br>
-              <a:rPr lang="en-US" altLang="ko-KR" dirty="0"/>
-            </a:br>
-            <a:r>
-              <a:rPr lang="ko-KR" altLang="en-US" dirty="0"/>
-              <a:t>새 </a:t>
-            </a:r>
-            <a:r>
-              <a:rPr lang="en-US" altLang="ko-KR" dirty="0"/>
-              <a:t>AST </a:t>
-            </a:r>
-            <a:r>
-              <a:rPr lang="ko-KR" altLang="en-US" dirty="0"/>
-              <a:t>노드를 만드는 방식입니다</a:t>
-            </a:r>
-            <a:r>
-              <a:rPr lang="en-US" altLang="ko-KR" dirty="0"/>
-              <a:t>.</a:t>
-            </a:r>
-          </a:p>
-          <a:p>
-            <a:r>
-              <a:rPr lang="ko-KR" altLang="en-US" dirty="0"/>
-              <a:t>연산자 종류만 다르고 구조는 거의 같았습니다</a:t>
+              <a:t>여기서 연산자 종류만 다르고 구조는 거의 같았습니다</a:t>
             </a:r>
             <a:r>
               <a:rPr lang="en-US" altLang="ko-KR" dirty="0"/>
@@ -3706,29 +3482,7 @@
             </a:r>
             <a:r>
               <a:rPr lang="ko-KR" altLang="en-US" dirty="0"/>
-              <a:t> 처리할 연산자만 넘기는 형태가 됐습니다</a:t>
-            </a:r>
-            <a:r>
-              <a:rPr lang="en-US" altLang="ko-KR" dirty="0"/>
-              <a:t>.</a:t>
-            </a:r>
-          </a:p>
-          <a:p>
-            <a:r>
-              <a:rPr lang="ko-KR" altLang="en-US" dirty="0"/>
-              <a:t>결과적으로 </a:t>
-            </a:r>
-            <a:r>
-              <a:rPr lang="en-US" altLang="ko-KR" dirty="0"/>
-              <a:t>6</a:t>
-            </a:r>
-            <a:r>
-              <a:rPr lang="ko-KR" altLang="en-US" dirty="0"/>
-              <a:t>개 메서드의 중복이 줄었고</a:t>
-            </a:r>
-            <a:r>
-              <a:rPr lang="en-US" altLang="ko-KR" dirty="0"/>
-              <a:t>,</a:t>
+              <a:t> 처리할 연산자만 넘기는 형태가 됐고</a:t>
             </a:r>
             <a:br>
               <a:rPr lang="en-US" altLang="ko-KR" dirty="0"/>
@@ -4216,27 +3970,6 @@
           <a:p>
             <a:r>
               <a:rPr lang="ko-KR" altLang="en-US" dirty="0"/>
-              <a:t>그래서 메서드가 길어지고</a:t>
-            </a:r>
-            <a:r>
-              <a:rPr lang="en-US" altLang="ko-KR" dirty="0"/>
-              <a:t>,</a:t>
-            </a:r>
-            <a:br>
-              <a:rPr lang="en-US" altLang="ko-KR" dirty="0"/>
-            </a:br>
-            <a:r>
-              <a:rPr lang="ko-KR" altLang="en-US" dirty="0"/>
-              <a:t>내장 함수가 늘어날수록 더 복잡해질 구조였습니다</a:t>
-            </a:r>
-            <a:r>
-              <a:rPr lang="en-US" altLang="ko-KR" dirty="0"/>
-              <a:t>.</a:t>
-            </a:r>
-          </a:p>
-          <a:p>
-            <a:r>
-              <a:rPr lang="ko-KR" altLang="en-US" dirty="0"/>
               <a:t>수정 후에는 </a:t>
             </a:r>
             <a:r>
@@ -4633,7 +4366,7 @@
             </a:r>
             <a:r>
               <a:rPr lang="ko-KR" altLang="en-US" dirty="0"/>
-              <a:t>개 작성을 보조했습니다</a:t>
+              <a:t>개 작성에 도움을 받았습니다</a:t>
             </a:r>
             <a:r>
               <a:rPr lang="en-US" altLang="ko-KR" dirty="0"/>
@@ -4868,6 +4601,45 @@
             </a:r>
           </a:p>
           <a:p>
+            <a:endParaRPr lang="en-US" altLang="ko-KR" dirty="0"/>
+          </a:p>
+          <a:p>
+            <a:r>
+              <a:rPr lang="en-US" altLang="ko-KR" dirty="0"/>
+              <a:t>cd scripts\demo</a:t>
+            </a:r>
+          </a:p>
+          <a:p>
+            <a:r>
+              <a:rPr lang="en-US" altLang="ko-KR" dirty="0"/>
+              <a:t> .\demo_runner.ps1 -Mode </a:t>
+            </a:r>
+            <a:r>
+              <a:rPr lang="en-US" altLang="ko-KR" dirty="0" err="1"/>
+              <a:t>repl</a:t>
+            </a:r>
+            <a:r>
+              <a:rPr lang="en-US" altLang="ko-KR" dirty="0"/>
+              <a:t> -File demo1_repl.txt</a:t>
+            </a:r>
+          </a:p>
+          <a:p>
+            <a:r>
+              <a:rPr lang="en-US" altLang="ko-KR" dirty="0"/>
+              <a:t> .\demo_runner.ps1 -Mode run -File demo2_algorithm.cb</a:t>
+            </a:r>
+          </a:p>
+          <a:p>
+            <a:r>
+              <a:rPr lang="en-US" altLang="ko-KR" dirty="0"/>
+              <a:t> .\demo_runner.ps1 -Mode run -File demo3_error.cb </a:t>
+            </a:r>
+          </a:p>
+          <a:p>
+            <a:r>
+              <a:rPr lang="en-US" altLang="ko-KR" dirty="0"/>
+              <a:t> .\demo_runner.ps1 -Mode debug -File demo4_debug.cb -Commands demo4_commands.txt</a:t>
+            </a:r>
             <a:endParaRPr lang="ko-KR" altLang="en-US" dirty="0"/>
           </a:p>
         </p:txBody>
@@ -5381,16 +5153,6 @@
             <a:r>
               <a:rPr lang="en-US" altLang="ko-KR" dirty="0"/>
               <a:t>.</a:t>
-            </a:r>
-          </a:p>
-          <a:p>
-            <a:r>
-              <a:rPr lang="ko-KR" altLang="en-US" dirty="0"/>
-              <a:t>먼저 팀 소개를 마치고</a:t>
-            </a:r>
-            <a:r>
-              <a:rPr lang="en-US" altLang="ko-KR" dirty="0"/>
-              <a:t>,</a:t>
             </a:r>
             <a:br>
               <a:rPr lang="en-US" altLang="ko-KR" dirty="0"/>
